--- a/presentations/KlimaGuard-Kids-Pitch.pptx
+++ b/presentations/KlimaGuard-Kids-Pitch.pptx
@@ -3876,7 +3876,7 @@
               </a:defRPr>
             </a:pPr>
             <a:r>
-              <a:t>Six cooperating agents ingest trusted feeds and output unified preparedness briefings.</a:t>
+              <a:t>Nine cooperating agents ingest trusted feeds and output unified preparedness briefings.</a:t>
             </a:r>
           </a:p>
           <a:p>
@@ -4028,7 +4028,7 @@
               </a:defRPr>
             </a:pPr>
             <a:r>
-              <a:t>Six AI agents — one pipeline</a:t>
+              <a:t>Nine AI agents — one pipeline</a:t>
             </a:r>
           </a:p>
         </p:txBody>
@@ -4142,6 +4142,36 @@
             </a:pPr>
             <a:r>
               <a:t>Synthesis Agent — cross-correlation + age-banded child guidance</a:t>
+            </a:r>
+          </a:p>
+          <a:p>
+            <a:pPr>
+              <a:spcAft>
+                <a:spcPts val="1000"/>
+              </a:spcAft>
+              <a:defRPr sz="1700">
+                <a:solidFill>
+                  <a:srgbClr val="0F172A"/>
+                </a:solidFill>
+              </a:defRPr>
+            </a:pPr>
+            <a:r>
+              <a:t>India Regional + Impact Agents — CHIS scores across 12 Indian regions</a:t>
+            </a:r>
+          </a:p>
+          <a:p>
+            <a:pPr>
+              <a:spcAft>
+                <a:spcPts val="1000"/>
+              </a:spcAft>
+              <a:defRPr sz="1700">
+                <a:solidFill>
+                  <a:srgbClr val="0F172A"/>
+                </a:solidFill>
+              </a:defRPr>
+            </a:pPr>
+            <a:r>
+              <a:t>Kids Health Chat Agent — age-banded Q&amp;A with privacy safeguards</a:t>
             </a:r>
           </a:p>
         </p:txBody>
@@ -4393,7 +4423,7 @@
               </a:defRPr>
             </a:pPr>
             <a:r>
-              <a:t>Web dashboard + global country selector</a:t>
+              <a:t>Web dashboard + India impact dashboard + kids health chat</a:t>
             </a:r>
           </a:p>
           <a:p>
@@ -4423,7 +4453,7 @@
               </a:defRPr>
             </a:pPr>
             <a:r>
-              <a:t>Extensible to any lat/lon via API</a:t>
+              <a:t>POST /api/chat — age-banded health Q&amp;A</a:t>
             </a:r>
           </a:p>
           <a:p>
@@ -4694,7 +4724,7 @@
               </a:defRPr>
             </a:pPr>
             <a:r>
-              <a:t>6</a:t>
+              <a:t>9</a:t>
             </a:r>
           </a:p>
         </p:txBody>
@@ -4809,7 +4839,7 @@
               </a:defRPr>
             </a:pPr>
             <a:r>
-              <a:t>3</a:t>
+              <a:t>12</a:t>
             </a:r>
           </a:p>
         </p:txBody>
@@ -4844,7 +4874,7 @@
               </a:defRPr>
             </a:pPr>
             <a:r>
-              <a:t>Age bands (5–8, 9–12, 13–17)</a:t>
+              <a:t>India regions with CHIS</a:t>
             </a:r>
           </a:p>
         </p:txBody>

--- a/presentations/KlimaGuard-Kids-Pitch.pptx
+++ b/presentations/KlimaGuard-Kids-Pitch.pptx
@@ -4028,7 +4028,7 @@
               </a:defRPr>
             </a:pPr>
             <a:r>
-              <a:t>Nine AI agents — one pipeline</a:t>
+              <a:t>Eight AI agents — one pipeline</a:t>
             </a:r>
           </a:p>
         </p:txBody>
@@ -4096,7 +4096,7 @@
               </a:defRPr>
             </a:pPr>
             <a:r>
-              <a:t>Nutrition Agent — hydration, food safety, scarcity patterns</a:t>
+              <a:t>Nutrition Agent — hydration, food safety, scarcity patterns (FAO/IPC framed)</a:t>
             </a:r>
           </a:p>
           <a:p>
@@ -4111,7 +4111,7 @@
               </a:defRPr>
             </a:pPr>
             <a:r>
-              <a:t>Disease Agent — transmission pathways, precautions, illness profiles</a:t>
+              <a:t>Disease Agent — WASH and climate-sensitive disease outlook</a:t>
             </a:r>
           </a:p>
           <a:p>
@@ -4156,7 +4156,7 @@
               </a:defRPr>
             </a:pPr>
             <a:r>
-              <a:t>India Regional + Impact Agents — CHIS scores across 12 Indian regions</a:t>
+              <a:t>India Regional + Impact Agents — CHIS scores across 77 Indian regions</a:t>
             </a:r>
           </a:p>
           <a:p>
@@ -4171,7 +4171,7 @@
               </a:defRPr>
             </a:pPr>
             <a:r>
-              <a:t>Kids Health Chat Agent — age-banded Q&amp;A with privacy safeguards</a:t>
+              <a:t>Kids play — age-banded missions/badges (5–8 / 9–12 / 13–17)</a:t>
             </a:r>
           </a:p>
         </p:txBody>
@@ -4350,7 +4350,7 @@
               </a:defRPr>
             </a:pPr>
             <a:r>
-              <a:t>MIT open-source license</a:t>
+              <a:t>~50 validated reference sources · MIT license</a:t>
             </a:r>
           </a:p>
         </p:txBody>
@@ -4423,7 +4423,7 @@
               </a:defRPr>
             </a:pPr>
             <a:r>
-              <a:t>Web dashboard + India impact dashboard + kids health chat</a:t>
+              <a:t>Web dashboard + India CHIS + kids play</a:t>
             </a:r>
           </a:p>
           <a:p>
@@ -4453,7 +4453,7 @@
               </a:defRPr>
             </a:pPr>
             <a:r>
-              <a:t>POST /api/chat — age-banded health Q&amp;A</a:t>
+              <a:t>GET /api/countries · /api/india/regions</a:t>
             </a:r>
           </a:p>
           <a:p>
@@ -4609,7 +4609,7 @@
               </a:defRPr>
             </a:pPr>
             <a:r>
-              <a:t>20</a:t>
+              <a:t>159</a:t>
             </a:r>
           </a:p>
         </p:txBody>
@@ -4724,7 +4724,7 @@
               </a:defRPr>
             </a:pPr>
             <a:r>
-              <a:t>9</a:t>
+              <a:t>482</a:t>
             </a:r>
           </a:p>
         </p:txBody>
@@ -4759,7 +4759,7 @@
               </a:defRPr>
             </a:pPr>
             <a:r>
-              <a:t>Cooperating AI agents</a:t>
+              <a:t>Tier 1–3 cities</a:t>
             </a:r>
           </a:p>
         </p:txBody>
@@ -4839,7 +4839,7 @@
               </a:defRPr>
             </a:pPr>
             <a:r>
-              <a:t>12</a:t>
+              <a:t>77</a:t>
             </a:r>
           </a:p>
         </p:txBody>
@@ -4954,7 +4954,7 @@
               </a:defRPr>
             </a:pPr>
             <a:r>
-              <a:t>&lt;5s</a:t>
+              <a:t>50</a:t>
             </a:r>
           </a:p>
         </p:txBody>
@@ -4989,7 +4989,7 @@
               </a:defRPr>
             </a:pPr>
             <a:r>
-              <a:t>End-to-end analysis per location</a:t>
+              <a:t>Validated data sources</a:t>
             </a:r>
           </a:p>
         </p:txBody>
